--- a/content/W01/D4/C2_W01_D04_deck_half1_STUDENT.pptx
+++ b/content/W01/D4/C2_W01_D04_deck_half1_STUDENT.pptx
@@ -3248,7 +3248,7 @@
                 </a:solidFill>
                 <a:latin typeface="Calibri"/>
               </a:rPr>
-              <a:t>[one column] &gt; [what is typical] &gt; [what one record does] &gt; [what the shape says] &gt; [per segment, with denominators]</a:t>
+              <a:t>[one column] &gt; [what is typical] &gt; [what one order does] &gt; [what the shape says] &gt; [per segment, with denominators]</a:t>
             </a:r>
           </a:p>
         </p:txBody>
@@ -3378,7 +3378,7 @@
                 </a:solidFill>
                 <a:latin typeface="Calibri"/>
               </a:rPr>
-              <a:t>Now change one record</a:t>
+              <a:t>Now swap one order</a:t>
             </a:r>
           </a:p>
         </p:txBody>
@@ -3412,7 +3412,7 @@
                 </a:solidFill>
                 <a:latin typeface="Calibri"/>
               </a:rPr>
-              <a:t>The last value was Rs 10,000. Make it Rs 80,000. Nothing else changes.</a:t>
+              <a:t>Keep the same seven. Replace the largest, Rs 2,835, with the largest order in the real file: Rs 480,000.</a:t>
             </a:r>
           </a:p>
           <a:p>
@@ -3445,7 +3445,7 @@
                 </a:solidFill>
                 <a:latin typeface="Consolas"/>
               </a:rPr>
-              <a:t>| Mean | Rs 5,000 | Rs 15,000 |</a:t>
+              <a:t>| Mean | Rs 1,676.43 | Rs 69,842.86 |</a:t>
             </a:r>
           </a:p>
           <a:p>
@@ -3456,7 +3456,7 @@
                 </a:solidFill>
                 <a:latin typeface="Consolas"/>
               </a:rPr>
-              <a:t>| Median | Rs 4,500 | Rs 4,500 |</a:t>
+              <a:t>| Median | Rs 1,310 | Rs 1,310 |</a:t>
             </a:r>
           </a:p>
           <a:p>
@@ -3467,7 +3467,7 @@
                 </a:solidFill>
                 <a:latin typeface="Calibri"/>
               </a:rPr>
-              <a:t>One record moved the mean by three times. The median did not move at all.</a:t>
+              <a:t>One order moved the mean by nearly forty-two times. The median did not move at all.</a:t>
             </a:r>
           </a:p>
           <a:p>
@@ -3642,7 +3642,7 @@
                 </a:solidFill>
                 <a:latin typeface="Calibri"/>
               </a:rPr>
-              <a:t>In your 47 records, the most common amount is Rs 4,500. It appears three times.</a:t>
+              <a:t>In your 44 orders, the most repeated amount appears twice.</a:t>
             </a:r>
           </a:p>
           <a:p>
@@ -3653,7 +3653,7 @@
                 </a:solidFill>
                 <a:latin typeface="Calibri"/>
               </a:rPr>
-              <a:t>Three times out of 47. It describes six percent of the file and nothing else.</a:t>
+              <a:t>Twice out of forty-four. It describes four percent of the file and nothing else.</a:t>
             </a:r>
           </a:p>
           <a:p>
@@ -3664,7 +3664,7 @@
                 </a:solidFill>
                 <a:latin typeface="Calibri"/>
               </a:rPr>
-              <a:t>Mode earns its keep on categories, where "the most common segment" is a real answer. On a money column it is close to useless, and knowing why is more valuable than knowing the definition.</a:t>
+              <a:t>Mode earns its keep on categories, where "the most common segment" or "the most common status" is a real answer. On a money column it is close to useless, and knowing why is more valuable than knowing the definition.</a:t>
             </a:r>
           </a:p>
         </p:txBody>
@@ -3850,7 +3850,7 @@
                 </a:solidFill>
                 <a:latin typeface="Consolas"/>
               </a:rPr>
-              <a:t>| Mean | If the total were shared equally, what would each record hold |</a:t>
+              <a:t>| Mean | If the total were shared equally, what would each order carry |</a:t>
             </a:r>
           </a:p>
           <a:p>
@@ -3861,7 +3861,7 @@
                 </a:solidFill>
                 <a:latin typeface="Consolas"/>
               </a:rPr>
-              <a:t>| Median | What does the record in the middle of the queue look like |</a:t>
+              <a:t>| Median | What does the order in the middle of the queue look like |</a:t>
             </a:r>
           </a:p>
           <a:p>
@@ -4013,7 +4013,7 @@
                 </a:solidFill>
                 <a:latin typeface="Calibri"/>
               </a:rPr>
-              <a:t>SECTION 2: WHAT ONE RECORD DOES</a:t>
+              <a:t>SECTION 2: WHAT ONE ORDER DOES</a:t>
             </a:r>
           </a:p>
         </p:txBody>
@@ -4047,7 +4047,7 @@
                 </a:solidFill>
                 <a:latin typeface="Calibri"/>
               </a:rPr>
-              <a:t>[one column] &gt; [what is typical] &gt; [what one record does] &gt; [what the shape says] &gt; [per segment, with denominators]</a:t>
+              <a:t>[one column] &gt; [what is typical] &gt; [what one order does] &gt; [what the shape says] &gt; [per segment, with denominators]</a:t>
             </a:r>
           </a:p>
         </p:txBody>
@@ -4211,7 +4211,7 @@
                 </a:solidFill>
                 <a:latin typeface="Calibri"/>
               </a:rPr>
-              <a:t>You just did this by hand on seven values. Here it is on all 47.</a:t>
+              <a:t>You just did this by hand on seven orders. Here it is on all 44.</a:t>
             </a:r>
           </a:p>
           <a:p>
@@ -4222,7 +4222,7 @@
                 </a:solidFill>
                 <a:latin typeface="Consolas"/>
               </a:rPr>
-              <a:t>mean amount over 47 records: Rs 18000.00</a:t>
+              <a:t>mean amount over 44 orders: Rs 12,753.30</a:t>
             </a:r>
           </a:p>
           <a:p>
@@ -4233,7 +4233,7 @@
                 </a:solidFill>
                 <a:latin typeface="Calibri"/>
               </a:rPr>
-              <a:t>The code is correct. Check it if you like. Add them, divide by 47, you get Rs 18,000.</a:t>
+              <a:t>The code is correct. Check it if you like. Add them, divide by 44, you get Rs 12,753.30.</a:t>
             </a:r>
           </a:p>
         </p:txBody>
@@ -4397,7 +4397,7 @@
                 </a:solidFill>
                 <a:latin typeface="Consolas"/>
               </a:rPr>
-              <a:t>mean amount over 47 records: Rs 18000.00</a:t>
+              <a:t>mean amount over 44 orders: Rs 12,753.30</a:t>
             </a:r>
           </a:p>
           <a:p>
@@ -4408,7 +4408,7 @@
                 </a:solidFill>
                 <a:latin typeface="Consolas"/>
               </a:rPr>
-              <a:t>records at or above Rs 18000.00: 1</a:t>
+              <a:t>orders at or above Rs 12,753.30: 1</a:t>
             </a:r>
           </a:p>
           <a:p>
@@ -4419,7 +4419,7 @@
                 </a:solidFill>
                 <a:latin typeface="Consolas"/>
               </a:rPr>
-              <a:t>records below Rs 18000.00: 46</a:t>
+              <a:t>orders below Rs 12,753.30: 43</a:t>
             </a:r>
           </a:p>
           <a:p>
@@ -4430,7 +4430,7 @@
                 </a:solidFill>
                 <a:latin typeface="Calibri"/>
               </a:rPr>
-              <a:t>The average describes one record out of 47.</a:t>
+              <a:t>The average describes one order out of forty-four.</a:t>
             </a:r>
           </a:p>
           <a:p>
@@ -4441,7 +4441,7 @@
                 </a:solidFill>
                 <a:latin typeface="Calibri"/>
               </a:rPr>
-              <a:t>Forty-six people in this file are below the number you were about to call typical.</a:t>
+              <a:t>Forty-three of Kalpa's customers are below the number you were about to call typical.</a:t>
             </a:r>
           </a:p>
         </p:txBody>
@@ -4605,7 +4605,7 @@
                 </a:solidFill>
                 <a:latin typeface="Consolas"/>
               </a:rPr>
-              <a:t>... 13000   13600   14200   14800   15600   17400   480000</a:t>
+              <a:t>... 2,855   2,895   2,895   2,930   2,990   2,995   480,000</a:t>
             </a:r>
           </a:p>
           <a:p>
@@ -4627,7 +4627,7 @@
                 </a:solidFill>
                 <a:latin typeface="Calibri"/>
               </a:rPr>
-              <a:t>The second largest order in the entire file is Rs 17,400. The largest is Rs 480,000, which is 27 times the one below it.</a:t>
+              <a:t>The second largest order in the entire file is Rs 2,995. The largest is Rs 480,000, which is a hundred and sixty times the one below it.</a:t>
             </a:r>
           </a:p>
         </p:txBody>
@@ -4785,13 +4785,24 @@
           <a:lstStyle/>
           <a:p>
             <a:r>
+              <a:rPr sz="1700">
+                <a:solidFill>
+                  <a:srgbClr val="2B4A7D"/>
+                </a:solidFill>
+                <a:latin typeface="Consolas"/>
+              </a:rPr>
+              <a:t>KR4232   C1749   Retail-Core   480000   delivered   2026-08-19</a:t>
+            </a:r>
+          </a:p>
+          <a:p>
+            <a:r>
               <a:rPr sz="2100">
                 <a:solidFill>
                   <a:srgbClr val="1C1C1A"/>
                 </a:solidFill>
                 <a:latin typeface="Calibri"/>
               </a:rPr>
-              <a:t>One record, Rs 480,000, in segment_b.</a:t>
+              <a:t>One order. It carries 85.5 percent of every rupee in the file.</a:t>
             </a:r>
           </a:p>
           <a:p>
@@ -4802,7 +4813,7 @@
                 </a:solidFill>
                 <a:latin typeface="Calibri"/>
               </a:rPr>
-              <a:t>It is not a typo, not a text value, not a duplicate. Yesterday's cleaning pass looked at it and kept it, because it is a real order that a real customer really placed.</a:t>
+              <a:t>It is not a typo, not a text value, not a duplicate. Yesterday's pass looked at it and kept it, and the decisions log says why: it converts cleanly and is well formed, so it is real until somebody says otherwise, and it was raised with the order book owner.</a:t>
             </a:r>
           </a:p>
           <a:p>
@@ -4813,7 +4824,7 @@
                 </a:solidFill>
                 <a:latin typeface="Calibri"/>
               </a:rPr>
-              <a:t>A record can be correct and still wreck every summary it touches.</a:t>
+              <a:t>An order can be correct and still wreck every summary it touches.</a:t>
             </a:r>
           </a:p>
         </p:txBody>
@@ -4999,7 +5010,7 @@
                 </a:solidFill>
                 <a:latin typeface="Consolas"/>
               </a:rPr>
-              <a:t>| All 47 records, mean | Rs 18,000.00 | Rs 7,956.52 |</a:t>
+              <a:t>| All orders, mean | Rs 12,753.30 | Rs 1,887.09 |</a:t>
             </a:r>
           </a:p>
           <a:p>
@@ -5010,18 +5021,7 @@
                 </a:solidFill>
                 <a:latin typeface="Consolas"/>
               </a:rPr>
-              <a:t>| All 47 records, median | Rs 7,500 | Rs 7,300 |</a:t>
-            </a:r>
-          </a:p>
-          <a:p>
-            <a:r>
-              <a:rPr sz="1700">
-                <a:solidFill>
-                  <a:srgbClr val="2B4A7D"/>
-                </a:solidFill>
-                <a:latin typeface="Consolas"/>
-              </a:rPr>
-              <a:t>| segment_b mean, 9 records | Rs 60,255.56 | Rs 7,787.50 |</a:t>
+              <a:t>| All orders, median | Rs 1,910.00 | Rs 1,865.00 |</a:t>
             </a:r>
           </a:p>
           <a:p>
@@ -5032,7 +5032,18 @@
                 </a:solidFill>
                 <a:latin typeface="Calibri"/>
               </a:rPr>
-              <a:t>Removing one record out of nine moves that segment's mean by a factor of nearly eight. The median barely twitches anywhere.</a:t>
+              <a:t>Take one order out of forty-four and the mean falls by a factor of nearly seven, landing within Rs 22 of the median. The median moves by Rs 45.</a:t>
+            </a:r>
+          </a:p>
+          <a:p>
+            <a:r>
+              <a:rPr sz="2100">
+                <a:solidFill>
+                  <a:srgbClr val="1C1C1A"/>
+                </a:solidFill>
+                <a:latin typeface="Calibri"/>
+              </a:rPr>
+              <a:t>That is the tell. When removing a single record makes the mean and the median agree, the mean was describing that record rather than the business.</a:t>
             </a:r>
           </a:p>
         </p:txBody>
@@ -5207,7 +5218,7 @@
                 </a:solidFill>
                 <a:latin typeface="Calibri"/>
               </a:rPr>
-              <a:t>Deleting a real record to make a number look nicer is how a report becomes fiction. Yesterday you wrote a decisions log precisely so that nobody could do this quietly.</a:t>
+              <a:t>Deleting a real order to make a number look nicer is how a report becomes fiction. Yesterday you wrote a decisions log precisely so that nobody could do this quietly.</a:t>
             </a:r>
           </a:p>
           <a:p>
@@ -5218,7 +5229,7 @@
                 </a:solidFill>
                 <a:latin typeface="Calibri"/>
               </a:rPr>
-              <a:t>The record stays. The statistic changes.</a:t>
+              <a:t>The order stays. The statistic changes.</a:t>
             </a:r>
           </a:p>
         </p:txBody>
@@ -5382,7 +5393,7 @@
                 </a:solidFill>
                 <a:latin typeface="Calibri"/>
               </a:rPr>
-              <a:t>Yesterday you decided which records were usable. Today somebody asks you what they say.</a:t>
+              <a:t>Yesterday you decided which of Kalpa's fifty orders were usable. Today somebody asks what they say.</a:t>
             </a:r>
           </a:p>
           <a:p>
@@ -5393,7 +5404,7 @@
                 </a:solidFill>
                 <a:latin typeface="Calibri"/>
               </a:rPr>
-              <a:t>The three questions this half answers: what is a typical value, what does one strange record do to that answer, and what shape is hiding behind the number you are about to send.</a:t>
+              <a:t>The three questions this half answers: what is a typical order, what does one strange order do to that answer, and what shape is hiding behind the number you are about to send.</a:t>
             </a:r>
           </a:p>
         </p:txBody>
@@ -5743,7 +5754,7 @@
                 </a:solidFill>
                 <a:latin typeface="Calibri"/>
               </a:rPr>
-              <a:t>[one column] &gt; [what is typical] &gt; [what one record does] &gt; [what the shape says] &gt; [per segment, with denominators]</a:t>
+              <a:t>[one column] &gt; [what is typical] &gt; [what one order does] &gt; [what the shape says] &gt; [per segment, with denominators]</a:t>
             </a:r>
           </a:p>
         </p:txBody>
@@ -5907,7 +5918,7 @@
                 </a:solidFill>
                 <a:latin typeface="Consolas"/>
               </a:rPr>
-              <a:t>min:    Rs 1,800</a:t>
+              <a:t>min:    Rs      800</a:t>
             </a:r>
           </a:p>
           <a:p>
@@ -5918,7 +5929,7 @@
                 </a:solidFill>
                 <a:latin typeface="Consolas"/>
               </a:rPr>
-              <a:t>max:    Rs 480,000</a:t>
+              <a:t>max:    Rs  480,000</a:t>
             </a:r>
           </a:p>
           <a:p>
@@ -5929,7 +5940,7 @@
                 </a:solidFill>
                 <a:latin typeface="Consolas"/>
               </a:rPr>
-              <a:t>range:  Rs 478,200</a:t>
+              <a:t>range:  Rs  479,200</a:t>
             </a:r>
           </a:p>
           <a:p>
@@ -5940,7 +5951,7 @@
                 </a:solidFill>
                 <a:latin typeface="Calibri"/>
               </a:rPr>
-              <a:t>The range is one subtraction and it is the least stable number on this slide. It is built from exactly two records, and one of them is the whale.</a:t>
+              <a:t>The range is one subtraction and the least stable number on this slide. It is built from exactly two orders out of forty-four, and one of them is the whale.</a:t>
             </a:r>
           </a:p>
           <a:p>
@@ -5951,7 +5962,7 @@
                 </a:solidFill>
                 <a:latin typeface="Calibri"/>
               </a:rPr>
-              <a:t>A statistic computed from two records out of 47 tells you about those two records.</a:t>
+              <a:t>A statistic computed from two orders out of forty-four tells you about those two orders.</a:t>
             </a:r>
           </a:p>
         </p:txBody>
@@ -6081,7 +6092,7 @@
                 </a:solidFill>
                 <a:latin typeface="Calibri"/>
               </a:rPr>
-              <a:t>The fence, met again</a:t>
+              <a:t>The fence, done properly</a:t>
             </a:r>
           </a:p>
         </p:txBody>
@@ -6115,7 +6126,18 @@
                 </a:solidFill>
                 <a:latin typeface="Calibri"/>
               </a:rPr>
-              <a:t>Yesterday you flagged an outlier by sorting and looking at the tail. Here is the same idea with a rule attached, so it runs without you.</a:t>
+              <a:t>Yesterday you flagged the whale with a fence at ten times the middle order. That worked and it was deliberately crude, because somebody chose the ten.</a:t>
+            </a:r>
+          </a:p>
+          <a:p>
+            <a:r>
+              <a:rPr sz="2100">
+                <a:solidFill>
+                  <a:srgbClr val="1C1C1A"/>
+                </a:solidFill>
+                <a:latin typeface="Calibri"/>
+              </a:rPr>
+              <a:t>Here is the standard version, built from the spread of the middle half rather than from a number anybody picked.</a:t>
             </a:r>
           </a:p>
           <a:p>
@@ -6126,7 +6148,7 @@
                 </a:solidFill>
                 <a:latin typeface="Consolas"/>
               </a:rPr>
-              <a:t>Q1 (a quarter of the way up):        Rs 4,800</a:t>
+              <a:t>Q1 (a quarter of the way up):        Rs  1,287.50</a:t>
             </a:r>
           </a:p>
           <a:p>
@@ -6137,7 +6159,7 @@
                 </a:solidFill>
                 <a:latin typeface="Consolas"/>
               </a:rPr>
-              <a:t>Q3 (three quarters of the way up):   Rs 10,900</a:t>
+              <a:t>Q3 (three quarters of the way up):   Rs  2,718.75</a:t>
             </a:r>
           </a:p>
           <a:p>
@@ -6148,7 +6170,7 @@
                 </a:solidFill>
                 <a:latin typeface="Consolas"/>
               </a:rPr>
-              <a:t>IQR = Q3 - Q1 =                      Rs 6,100</a:t>
+              <a:t>IQR = Q3 - Q1 =                      Rs  1,431.25</a:t>
             </a:r>
           </a:p>
           <a:p>
@@ -6159,7 +6181,7 @@
                 </a:solidFill>
                 <a:latin typeface="Consolas"/>
               </a:rPr>
-              <a:t>upper fence = Q3 + 1.5 x IQR =       Rs 20,050</a:t>
+              <a:t>upper fence = Q3 + 1.5 x IQR =       Rs  4,865.62</a:t>
             </a:r>
           </a:p>
         </p:txBody>
@@ -6323,7 +6345,7 @@
                 </a:solidFill>
                 <a:latin typeface="Consolas"/>
               </a:rPr>
-              <a:t>records above Rs 20,050: 1</a:t>
+              <a:t>orders above Rs 4,865.62: 1</a:t>
             </a:r>
           </a:p>
           <a:p>
@@ -6334,7 +6356,7 @@
                 </a:solidFill>
                 <a:latin typeface="Calibri"/>
               </a:rPr>
-              <a:t>One record. The whale, and nothing else. The highest ordinary order at Rs 17,400 sits comfortably inside the fence.</a:t>
+              <a:t>One order. The whale, and nothing else. The largest ordinary order at Rs 2,995 sits comfortably inside the fence.</a:t>
             </a:r>
           </a:p>
           <a:p>
@@ -6345,7 +6367,7 @@
                 </a:solidFill>
                 <a:latin typeface="Calibri"/>
               </a:rPr>
-              <a:t>The fence did in one line what the room did by eye on S12. That is the point of writing a rule down.</a:t>
+              <a:t>Two rules, built differently, agreeing on the same single record. That agreement is worth more than either rule alone.</a:t>
             </a:r>
           </a:p>
         </p:txBody>
@@ -6509,7 +6531,7 @@
                 </a:solidFill>
                 <a:latin typeface="Calibri"/>
               </a:rPr>
-              <a:t>The fence says "look at this record". It does not say "remove this record".</a:t>
+              <a:t>The fence says "look at this order". It does not say "remove this order".</a:t>
             </a:r>
           </a:p>
           <a:p>
@@ -6520,7 +6542,7 @@
                 </a:solidFill>
                 <a:latin typeface="Calibri"/>
               </a:rPr>
-              <a:t>Yesterday's language holds: an outlier is a finding to investigate before it is a row to delete. The fence just finds it faster.</a:t>
+              <a:t>Yesterday's language holds: an outlier is a finding to investigate before it is a row to delete. The fence just finds it faster, on a file too large to eyeball.</a:t>
             </a:r>
           </a:p>
         </p:txBody>
@@ -6684,7 +6706,7 @@
                 </a:solidFill>
                 <a:latin typeface="Calibri"/>
               </a:rPr>
-              <a:t>[one column] &gt; [what is typical] &gt; [what one record does] &gt; [what the shape says] &gt; [per segment, with denominators]</a:t>
+              <a:t>[one column] &gt; [what is typical] &gt; [what one order does] &gt; [what the shape says] &gt; [per segment, with denominators]</a:t>
             </a:r>
           </a:p>
         </p:txBody>
@@ -6859,7 +6881,7 @@
                 </a:solidFill>
                 <a:latin typeface="Consolas"/>
               </a:rPr>
-              <a:t>min        median                                          max</a:t>
+              <a:t> min      median                                            max</a:t>
             </a:r>
           </a:p>
           <a:p>
@@ -6870,7 +6892,7 @@
                 </a:solidFill>
                 <a:latin typeface="Consolas"/>
               </a:rPr>
-              <a:t>1800        7500                                        480000</a:t>
+              <a:t>  800      1,910                                        480,000</a:t>
             </a:r>
           </a:p>
           <a:p>
@@ -6881,7 +6903,7 @@
                 </a:solidFill>
                 <a:latin typeface="Consolas"/>
               </a:rPr>
-              <a:t> |------------|-------------------------------------------|</a:t>
+              <a:t>   |---------|-----------------------------------------------|</a:t>
             </a:r>
           </a:p>
           <a:p>
@@ -6892,7 +6914,7 @@
                 </a:solidFill>
                 <a:latin typeface="Consolas"/>
               </a:rPr>
-              <a:t>   5,700 down                472,500 up</a:t>
+              <a:t>    1,110 down                478,090 up</a:t>
             </a:r>
           </a:p>
           <a:p>
@@ -6903,7 +6925,7 @@
                 </a:solidFill>
                 <a:latin typeface="Calibri"/>
               </a:rPr>
-              <a:t>The distance up is 83 times the distance down. That lopsidedness is the skew, and you read it off sorted values with no arithmetic beyond one subtraction each way.</a:t>
+              <a:t>The distance up is 431 times the distance down. That lopsidedness is the skew, and you read it off sorted values with no arithmetic beyond one subtraction each way.</a:t>
             </a:r>
           </a:p>
         </p:txBody>
@@ -7100,7 +7122,7 @@
                 </a:solidFill>
                 <a:latin typeface="Calibri"/>
               </a:rPr>
-              <a:t>On this file: mean Rs 18,000, median Rs 7,500. The mean is 2.4 times the median, so you already know there is a tail before you look at a single record.</a:t>
+              <a:t>On this file: mean Rs 12,753.30, median Rs 1,910.00. The mean is 6.68 times the median, so you already know there is a tail before you look at a single order.</a:t>
             </a:r>
           </a:p>
         </p:txBody>
@@ -7450,7 +7472,7 @@
                 </a:solidFill>
                 <a:latin typeface="Calibri"/>
               </a:rPr>
-              <a:t>[one column] &gt; [what is typical] &gt; [what one record does] &gt; [what the shape says] &gt; [per segment, with denominators]</a:t>
+              <a:t>[one column] &gt; [what is typical] &gt; [what one order does] &gt; [what the shape says] &gt; [per segment, with denominators]</a:t>
             </a:r>
           </a:p>
           <a:p>
@@ -7461,7 +7483,18 @@
                 </a:solidFill>
                 <a:latin typeface="Calibri"/>
               </a:rPr>
-              <a:t>You own a cleaned file and a decisions log. Every number today comes off that file and nothing else. Describing data you have not cleaned is yesterday's mistake, and this room already made it once on purpose.</a:t>
+              <a:t>You own a profiled file and a decisions log. Every number today comes off that file and nothing else. Describing data you have not cleaned is yesterday's mistake, and this room already made it once on purpose.</a:t>
+            </a:r>
+          </a:p>
+          <a:p>
+            <a:r>
+              <a:rPr sz="2100">
+                <a:solidFill>
+                  <a:srgbClr val="1C1C1A"/>
+                </a:solidFill>
+                <a:latin typeface="Calibri"/>
+              </a:rPr>
+              <a:t>Two things you inherited and should keep in view: KR4201 still appears twice, because you chose to keep both rows and flag the pair. Student held twelve orders in the raw file and holds ten now, because two failed conversion.</a:t>
             </a:r>
           </a:p>
         </p:txBody>
@@ -8227,7 +8260,7 @@
                 </a:solidFill>
                 <a:latin typeface="Calibri"/>
               </a:rPr>
-              <a:t>Two true claims about the same 47 records:</a:t>
+              <a:t>Two true statements about the same 44 orders:</a:t>
             </a:r>
           </a:p>
           <a:p>
@@ -8238,7 +8271,7 @@
                 </a:solidFill>
                 <a:latin typeface="Consolas"/>
               </a:rPr>
-              <a:t>The average order is Rs 18,000.</a:t>
+              <a:t>The average Kalpa order is Rs 12,753.30.</a:t>
             </a:r>
           </a:p>
           <a:p>
@@ -8249,7 +8282,7 @@
                 </a:solidFill>
                 <a:latin typeface="Consolas"/>
               </a:rPr>
-              <a:t>Not one order in this file reached Rs 18,000, except a single order of Rs 480,000.</a:t>
+              <a:t>Forty-three of the forty-four orders are below Rs 3,000.</a:t>
             </a:r>
           </a:p>
           <a:p>
@@ -8260,7 +8293,7 @@
                 </a:solidFill>
                 <a:latin typeface="Calibri"/>
               </a:rPr>
-              <a:t>Both statements are correct. One of them would get you removed from the account.</a:t>
+              <a:t>Both are correct. One of them would get you removed from the account.</a:t>
             </a:r>
           </a:p>
           <a:p>
@@ -8446,7 +8479,7 @@
                 </a:solidFill>
                 <a:latin typeface="Calibri"/>
               </a:rPr>
-              <a:t>&gt; What is the average order value?</a:t>
+              <a:t>&gt; What is our average order value?</a:t>
             </a:r>
           </a:p>
           <a:p>
@@ -8621,7 +8654,7 @@
                 </a:solidFill>
                 <a:latin typeface="Calibri"/>
               </a:rPr>
-              <a:t>[one column] &gt; [what is typical] &gt; [what one record does] &gt; [what the shape says] &gt; [per segment, with denominators]</a:t>
+              <a:t>[one column] &gt; [what is typical] &gt; [what one order does] &gt; [what the shape says] &gt; [per segment, with denominators]</a:t>
             </a:r>
           </a:p>
         </p:txBody>
@@ -8751,7 +8784,7 @@
                 </a:solidFill>
                 <a:latin typeface="Calibri"/>
               </a:rPr>
-              <a:t>Seven values, on paper</a:t>
+              <a:t>Seven orders, on paper</a:t>
             </a:r>
           </a:p>
         </p:txBody>
@@ -8785,7 +8818,7 @@
                 </a:solidFill>
                 <a:latin typeface="Calibri"/>
               </a:rPr>
-              <a:t>The first seven records of your cleaned file, amount column only:</a:t>
+              <a:t>The first seven orders in your profiled file, amount column only:</a:t>
             </a:r>
           </a:p>
           <a:p>
@@ -8796,7 +8829,7 @@
                 </a:solidFill>
                 <a:latin typeface="Consolas"/>
               </a:rPr>
-              <a:t>2000   3000   4000   4500   5000   6500   10000</a:t>
+              <a:t>1280   1865   2270   2835   1310   1145   1030</a:t>
             </a:r>
           </a:p>
           <a:p>
@@ -8971,7 +9004,7 @@
                 </a:solidFill>
                 <a:latin typeface="Consolas"/>
               </a:rPr>
-              <a:t>2000 + 3000 + 4000 + 4500 + 5000 + 6500 + 10000 = 35000</a:t>
+              <a:t>1280 + 1865 + 2270 + 2835 + 1310 + 1145 + 1030 = 11735</a:t>
             </a:r>
           </a:p>
           <a:p>
@@ -8982,7 +9015,7 @@
                 </a:solidFill>
                 <a:latin typeface="Consolas"/>
               </a:rPr>
-              <a:t>35000 / 7 = 5000</a:t>
+              <a:t>11735 / 7 = 1676.43</a:t>
             </a:r>
           </a:p>
           <a:p>
@@ -8993,7 +9026,7 @@
                 </a:solidFill>
                 <a:latin typeface="Calibri"/>
               </a:rPr>
-              <a:t>The mean is Rs 5,000. It is the value every record would hold if the total were shared out equally.</a:t>
+              <a:t>The mean is Rs 1,676.43. It is the value every order would carry if the total were shared out equally.</a:t>
             </a:r>
           </a:p>
           <a:p>
@@ -9004,7 +9037,7 @@
                 </a:solidFill>
                 <a:latin typeface="Calibri"/>
               </a:rPr>
-              <a:t>It uses every record, which is its strength and the whole of its weakness.</a:t>
+              <a:t>It uses every order, which is its strength and the whole of its weakness.</a:t>
             </a:r>
           </a:p>
         </p:txBody>
@@ -9168,7 +9201,7 @@
                 </a:solidFill>
                 <a:latin typeface="Consolas"/>
               </a:rPr>
-              <a:t>2000   3000   4000   [4500]   5000   6500   10000</a:t>
+              <a:t>1030   1145   1280   [1310]   1865   2270   2835</a:t>
             </a:r>
           </a:p>
           <a:p>
@@ -9201,7 +9234,7 @@
                 </a:solidFill>
                 <a:latin typeface="Calibri"/>
               </a:rPr>
-              <a:t>The median is Rs 4,500. Half the records sit at or below it, half at or above it.</a:t>
+              <a:t>The median is Rs 1,310. Half the orders sit at or below it, half at or above it.</a:t>
             </a:r>
           </a:p>
           <a:p>
